--- a/presentations/01-data/moneygame-progress.pptx
+++ b/presentations/01-data/moneygame-progress.pptx
@@ -118,14 +118,14 @@
   <p:extLst>
     <p:ext uri="{521415D9-36F7-43E2-AB2F-B90AF26B5E84}">
       <p14:sectionLst xmlns:p14="http://schemas.microsoft.com/office/powerpoint/2010/main">
-        <p14:section name="소개" id="{dd92aec4-a7c7-e94c-5570-2131efee4663}">
+        <p14:section name="소개" id="{be9b91a5-a1c6-83e4-96b5-94509a8bded1}">
           <p14:sldIdLst>
             <p14:sldId id="256"/>
             <p14:sldId id="257"/>
             <p14:sldId id="258"/>
           </p14:sldIdLst>
         </p14:section>
-        <p14:section name="데이터 확보" id="{6c6f8820-e161-7af8-2112-7bad382805e2}">
+        <p14:section name="데이터 확보" id="{dfdfd93f-bd7e-2799-67ff-e1fcac543651}">
           <p14:sldIdLst>
             <p14:sldId id="259"/>
             <p14:sldId id="260"/>
@@ -133,7 +133,7 @@
             <p14:sldId id="262"/>
           </p14:sldIdLst>
         </p14:section>
-        <p14:section name="게임 구간 선정" id="{ad1be488-ba82-9b40-0dc7-2c9d25a40a68}">
+        <p14:section name="게임 구간 선정" id="{3605d1c7-1843-18cd-404f-814878af6a3e}">
           <p14:sldIdLst>
             <p14:sldId id="263"/>
             <p14:sldId id="264"/>
@@ -141,7 +141,7 @@
             <p14:sldId id="266"/>
           </p14:sldIdLst>
         </p14:section>
-        <p14:section name="정리" id="{33535034-f568-3efe-7b4f-8b5082e8451e}">
+        <p14:section name="정리" id="{10f25ca1-b532-40f3-4e4e-94496fdc375c}">
           <p14:sldIdLst>
             <p14:sldId id="267"/>
           </p14:sldIdLst>
@@ -550,7 +550,7 @@
           <a:p>
             <a:r>
               <a:rPr lang="en-US" dirty="0"/>
-              <a:t>머니게임은 여러 명이 같은 방에서 실제 과거 시세를 빠르게 재생하며 거래하고, 끝날 때 남은 자산으로 순위를 가리는 웹게임입니다. 오늘은 이 게임의 재료가 되는 시세 데이터를 어떻게 확보하고, 게임에 쓸 구간을 어떤 기준으로 골랐는지 보고드리겠습니다.</a:t>
+              <a:t>머니게임은 여러 명이 같은 방에서 실제 과거 시세를 빠르게 재생하며 거래하고, 끝날 때 남은 자산으로 순위를 가리는 웹게임입니다. 오늘은 이 게임의 재료가 되는 시세 데이터를 어떻게 확보했고, 게임에 쓸 구간을 어떤 기준으로 골랐는지 말씀드리겠습니다.</a:t>
             </a:r>
             <a:endParaRPr lang="en-US" dirty="0"/>
           </a:p>
@@ -638,7 +638,7 @@
           <a:p>
             <a:r>
               <a:rPr lang="en-US" dirty="0"/>
-              <a:t>그래서 게임에 쓰기 전에 적격성 검사를 합니다. 거래량 0 봉 비율은 5% 이하, 연속으로 멈추는 건 5봉 이하여야 합니다. 시간외가 섞인 구간은 비율로는 통과하지만 연속 검사에서 걸리기 때문에 두 검사가 모두 필요합니다. 변동성 하한은 분봉과 일봉을 따로 둡니다. 오른쪽 표처럼 중앙값이 분봉 2%, 일봉 46% 로 스케일이 완전히 다르기 때문입니다. 기준값은 플레이해 보며 조정할 수 있게 열어 두었습니다.</a:t>
+              <a:t>그래서 게임에 쓰기 전에 적격성 검사를 합니다. 거래 없는 봉 비율은 5% 이하, 연속으로 멈추는 건 5봉 이하여야 합니다. 시간외가 섞인 구간은 비율로는 통과하지만 연속 검사에서 걸리기 때문에 두 검사가 모두 필요합니다. 변동성 하한은 분봉과 일봉을 따로 둡니다. 오른쪽 표처럼 중앙값이 분봉 2%, 일봉 46%로 스케일이 완전히 다르기 때문입니다. 기준값은 플레이해 보며 조정할 수 있게 열어 두었습니다.</a:t>
             </a:r>
             <a:endParaRPr lang="en-US" dirty="0"/>
           </a:p>
@@ -726,7 +726,7 @@
           <a:p>
             <a:r>
               <a:rPr lang="en-US" dirty="0"/>
-              <a:t>배율 상한을 어떻게 정할지 고민하다가 직접 계산해 봤습니다. 240봉 구간을 한 봉씩 밀어 가며, 배율별로 청산이 한 번이라도 나는 구간이 얼마나 되는지 셌습니다. 일봉은 배율 3 에서도 13% 구간에서 청산이 나지만, 분봉은 배율 20 까지도 0% 였습니다. 하루 안에서 10% 넘게 빠지는 날 자체가 169일에 한 번뿐이기 때문입니다. 또 같은 조건에서 종목 간 차이가 7배나 났습니다. 그래서 밸런스는 배율이 아니라 변동이 큰 구간을 골라서 맞추기로 했고, 그게 앞 장의 이동폭 기준입니다.</a:t>
+              <a:t>배율 상한을 어떻게 정할지 고민하다가 직접 계산해 봤습니다. 240봉 구간을 한 봉씩 밀어 가며, 배율별로 청산이 한 번이라도 나는 구간이 얼마나 되는지 셌습니다. 일봉은 배율 3에서도 13% 구간에서 청산이 나지만, 분봉은 배율 20까지도 0%였습니다. 하루 안에서 10% 넘게 빠지는 날 자체가 169일에 한 번뿐이기 때문입니다. 또 같은 조건에서 종목 간 차이가 7배나 났습니다. 그래서 밸런스는 배율이 아니라 변동이 큰 구간을 골라서 맞추기로 했고, 그게 앞 장의 이동폭 기준입니다.</a:t>
             </a:r>
             <a:endParaRPr lang="en-US" dirty="0"/>
           </a:p>
@@ -902,7 +902,7 @@
           <a:p>
             <a:r>
               <a:rPr lang="en-US" dirty="0"/>
-              <a:t>한 판의 흐름입니다. 방에 모여 시작하면 실제 과거 시세를 1초에 캔들 하나씩 재생합니다. 종목 이름은 가리고 A, B, C 로만 보여줍니다. 배율을 걸면 손익이 커지지만 손실이 커지면 강제로 청산됩니다. 4분이 지나면 남은 자산으로 순위를 매기고 실제 종목을 공개합니다. 그래서 이 게임은 실제 시세 데이터 없이는 시작할 수 없습니다.</a:t>
+              <a:t>한 판의 흐름입니다. 방에 모여 시작하면 실제 과거 시세를 1초에 캔들 하나씩 재생합니다. 종목 이름은 가리고 A, B, C로만 보여줍니다. 배율을 걸면 손익이 커지지만 손실이 커지면 강제로 청산됩니다. 4분이 지나면 남은 자산으로 순위를 매기고 실제 종목을 공개합니다. 그래서 이 게임은 실제 시세 데이터 없이는 시작할 수 없습니다.</a:t>
             </a:r>
             <a:endParaRPr lang="en-US" dirty="0"/>
           </a:p>
@@ -1078,7 +1078,7 @@
           <a:p>
             <a:r>
               <a:rPr lang="en-US" dirty="0"/>
-              <a:t>데이터는 미리 받아 두고, 게임은 저장된 데이터만 씁니다. 토스증권 Open API 에서 필요할 때만 받아 데이터베이스에 쌓고, 게임은 판이 시작될 때 한 번 읽습니다. 원칙이 두 가지 있습니다. 이 API 는 실계좌 주문까지 가능해서 시세 조회 외의 기능은 절대 부르지 않습니다. 그리고 게임이 진행되는 동안에는 바깥을 부르지 않아서, 네트워크 지연이 게임에 영향을 주지 않게 했습니다.</a:t>
+              <a:t>데이터는 미리 받아 두고, 게임은 저장된 데이터만 씁니다. 토스증권 API에서 필요할 때만 받아 데이터베이스에 쌓고, 게임은 판이 시작될 때 한 번 읽습니다. 원칙이 두 가지 있습니다. 이 API는 실계좌 주문까지 가능해서 시세 조회 외의 기능은 절대 부르지 않습니다. 그리고 게임이 진행되는 동안에는 외부를 부르지 않아서, 네트워크 지연이 게임에 영향을 주지 않게 했습니다.</a:t>
             </a:r>
             <a:endParaRPr lang="en-US" dirty="0"/>
           </a:p>
@@ -1254,7 +1254,7 @@
           <a:p>
             <a:r>
               <a:rPr lang="en-US" dirty="0"/>
-              <a:t>수집을 실제로 멈춰 세운 문제가 세 가지 있었습니다. 첫째, 속도 제한이 평균이 아니라 연속 요청을 막는 방식이어서, 요청 사이에 0.3초를 두는 것으로 해결했습니다. 둘째, 인증 토큰은 하나만 살아 있어서 수집을 두 개 동시에 돌리면 서로 무효로 만듭니다. 셋째, 등록된 IP 에서만 쓸 수 있어서 개발 컴퓨터를 바꾸자마자 막혔습니다. 세 가지 모두 원인을 찾아 해결했고, 운영 수칙으로 정리해 두었습니다.</a:t>
+              <a:t>수집을 실제로 멈춰 세운 문제가 세 가지 있었습니다. 첫째, 속도 제한이 평균이 아니라 연속 요청을 막는 방식이어서, 요청 사이에 0.3초를 두는 것으로 해결했습니다. 둘째, 인증 토큰은 하나만 살아 있어서 수집을 두 개 동시에 돌리면 서로 무효로 만듭니다. 셋째, 등록된 IP에서만 쓸 수 있어서 개발 컴퓨터를 바꾸자마자 막혔습니다. 세 가지 모두 원인을 찾아 해결했고, 운영 수칙으로 정리해 두었습니다.</a:t>
             </a:r>
             <a:endParaRPr lang="en-US" dirty="0"/>
           </a:p>
@@ -1518,7 +1518,7 @@
           <a:p>
             <a:r>
               <a:rPr lang="en-US" dirty="0"/>
-              <a:t>분봉은 대체거래소까지 합쳐 하루 720봉이지만 전부 쓰면 안 됩니다. 시간대별로 재 보니 프리마켓에는 거래량 0 봉이 15% 섞여 있고, 애프터는 거래가 정규장의 8분의 1 수준입니다. 특히 9시 봉과 15시 21분부터 30분까지는 14일 내내 거래량이 0 이었습니다. 9시 봉은 사실 개장 전 1분이고, 15시 21분부터는 종가 단일가 구간이기 때문입니다. 이 두 경계를 빼면 거래량 0 봉이 2.8% 에서 0.3% 로, 최대 연속 정지가 11봉에서 1봉으로 줄어듭니다. 11봉 정지는 화면이 11초 멈추는 것과 같습니다.</a:t>
+              <a:t>분봉은 대체거래소까지 합쳐 하루 720봉이지만 전부 쓰면 안 됩니다. 시간대별로 재 보니 프리마켓에는 거래가 없는 봉이 15% 섞여 있고, 애프터는 거래가 정규장의 8분의 1 수준입니다. 특히 9시 봉과 15시 21분부터 30분까지는 14일 내내 거래가 없었습니다. 9시 봉은 사실 개장 전 1분이고, 15시 21분부터는 종가 단일가 구간이기 때문입니다. 이 두 경계를 빼면 거래 없는 봉이 2.8%에서 0.3%로, 최대 연속 정지가 11봉에서 1봉으로 줄어듭니다. 11봉 정지는 화면이 11초 멈추는 것과 같습니다.</a:t>
             </a:r>
             <a:endParaRPr lang="en-US" dirty="0"/>
           </a:p>
@@ -2028,7 +2028,7 @@
                   <a:schemeClr val="accent6"/>
                 </a:solidFill>
               </a:rPr>
-              <a:t>머니게임 · 실제 시세를 게임 재료로</a:t>
+              <a:t>머니게임 | 실제 시세를 게임 재료로</a:t>
             </a:r>
             <a:endParaRPr lang="en-US" sz="900" dirty="0"/>
           </a:p>
@@ -2461,7 +2461,7 @@
                   <a:schemeClr val="accent1"/>
                 </a:solidFill>
               </a:rPr>
-              <a:t>머니게임 · 중간 점검</a:t>
+              <a:t>머니게임 | 중간 점검</a:t>
             </a:r>
             <a:endParaRPr lang="en-US" sz="1400" dirty="0"/>
           </a:p>
@@ -3098,7 +3098,7 @@
                   <a:schemeClr val="tx1"/>
                 </a:solidFill>
               </a:rPr>
-              <a:t>적격성 검사 — 멈추거나 밋밋한 구간은 버린다</a:t>
+              <a:t>적격성 검사로 쓸 구간을 거릅니다</a:t>
             </a:r>
             <a:endParaRPr lang="en-US" sz="3000" dirty="0"/>
           </a:p>
@@ -3194,7 +3194,7 @@
                   <a:schemeClr val="tx1"/>
                 </a:solidFill>
               </a:rPr>
-              <a:t>거래량 0 봉 비율</a:t>
+              <a:t>무거래 봉 비율</a:t>
             </a:r>
             <a:endParaRPr lang="en-US" sz="1400" dirty="0"/>
           </a:p>
@@ -3208,8 +3208,8 @@
         </p:nvSpPr>
         <p:spPr>
           <a:xfrm>
-            <a:off x="2377440" y="1463040"/>
-            <a:ext cx="2011680" cy="347472"/>
+            <a:off x="2286000" y="1463040"/>
+            <a:ext cx="2103120" cy="347472"/>
           </a:xfrm>
           <a:prstGeom prst="rect">
             <a:avLst/>
@@ -3230,7 +3230,7 @@
                   <a:schemeClr val="accent1"/>
                 </a:solidFill>
               </a:rPr>
-              <a:t>≤ 5%</a:t>
+              <a:t>5% 이하</a:t>
             </a:r>
             <a:endParaRPr lang="en-US" sz="1700" dirty="0"/>
           </a:p>
@@ -3266,7 +3266,7 @@
                   <a:schemeClr val="accent6"/>
                 </a:solidFill>
               </a:rPr>
-              <a:t>정상 구간 실측은 0.3%. 여유 있게 통과한다</a:t>
+              <a:t>정상 구간 실측 0.3%로 여유 있게 통과</a:t>
             </a:r>
             <a:endParaRPr lang="en-US" sz="1100" dirty="0"/>
           </a:p>
@@ -3338,8 +3338,8 @@
         </p:nvSpPr>
         <p:spPr>
           <a:xfrm>
-            <a:off x="2377440" y="2532888"/>
-            <a:ext cx="2011680" cy="347472"/>
+            <a:off x="2286000" y="2532888"/>
+            <a:ext cx="2103120" cy="347472"/>
           </a:xfrm>
           <a:prstGeom prst="rect">
             <a:avLst/>
@@ -3360,7 +3360,7 @@
                   <a:schemeClr val="accent1"/>
                 </a:solidFill>
               </a:rPr>
-              <a:t>≤ 5봉</a:t>
+              <a:t>5봉 이하</a:t>
             </a:r>
             <a:endParaRPr lang="en-US" sz="1700" dirty="0"/>
           </a:p>
@@ -3396,7 +3396,7 @@
                   <a:schemeClr val="accent6"/>
                 </a:solidFill>
               </a:rPr>
-              <a:t>시간외 섞인 구간: 비율 4.6% 로 통과,</a:t>
+              <a:t>시간외가 섞인 구간은 비율 4.6%로 통과하지만</a:t>
             </a:r>
             <a:endParaRPr lang="en-US" sz="1100" dirty="0"/>
           </a:p>
@@ -3410,7 +3410,7 @@
                   <a:schemeClr val="accent6"/>
                 </a:solidFill>
               </a:rPr>
-              <a:t>연속 11봉에서 걸린다 — 비율만으론 못 거른다</a:t>
+              <a:t>연속 11봉에서 걸림. 비율만으로는 못 거름</a:t>
             </a:r>
             <a:endParaRPr lang="en-US" sz="1100" dirty="0"/>
           </a:p>
@@ -3482,8 +3482,8 @@
         </p:nvSpPr>
         <p:spPr>
           <a:xfrm>
-            <a:off x="2377440" y="3602736"/>
-            <a:ext cx="2011680" cy="347472"/>
+            <a:off x="2286000" y="3602736"/>
+            <a:ext cx="2103120" cy="347472"/>
           </a:xfrm>
           <a:prstGeom prst="rect">
             <a:avLst/>
@@ -3504,7 +3504,7 @@
                   <a:schemeClr val="accent1"/>
                 </a:solidFill>
               </a:rPr>
-              <a:t>분봉 2.5% · 일봉 30%</a:t>
+              <a:t>분봉 2.5%, 일봉 30%</a:t>
             </a:r>
             <a:endParaRPr lang="en-US" sz="1700" dirty="0"/>
           </a:p>
@@ -3540,7 +3540,7 @@
                   <a:schemeClr val="accent6"/>
                 </a:solidFill>
               </a:rPr>
-              <a:t>시작가 대비 가장 크게 움직인 폭. 너무 잔잔한 판은 버린다</a:t>
+              <a:t>시작가 대비 최대 이동 폭. 너무 잔잔한 판 제외</a:t>
             </a:r>
             <a:endParaRPr lang="en-US" sz="1100" dirty="0"/>
           </a:p>
@@ -3576,7 +3576,7 @@
                   <a:schemeClr val="tx1"/>
                 </a:solidFill>
               </a:rPr>
-              <a:t>시작가 대비 최대 이동폭 — 240봉 구간 분포</a:t>
+              <a:t>시작가 대비 최대 이동폭 분포 (240봉 구간)</a:t>
             </a:r>
             <a:endParaRPr lang="en-US" sz="1300" dirty="0"/>
           </a:p>
@@ -3809,7 +3809,7 @@
                             <a:srgbClr val="0B0E14"/>
                           </a:solidFill>
                         </a:rPr>
-                        <a:t>10%</a:t>
+                        <a:t>하위 10%</a:t>
                       </a:r>
                       <a:endParaRPr lang="en-US" sz="1200" dirty="0"/>
                     </a:p>
@@ -3985,7 +3985,7 @@
                             <a:srgbClr val="0B0E14"/>
                           </a:solidFill>
                         </a:rPr>
-                        <a:t>25%</a:t>
+                        <a:t>하위 25%</a:t>
                       </a:r>
                       <a:endParaRPr lang="en-US" sz="1200" dirty="0"/>
                     </a:p>
@@ -4161,7 +4161,7 @@
                             <a:srgbClr val="0B0E14"/>
                           </a:solidFill>
                         </a:rPr>
-                        <a:t>50% (중앙)</a:t>
+                        <a:t>중앙값</a:t>
                       </a:r>
                       <a:endParaRPr lang="en-US" sz="1200" dirty="0"/>
                     </a:p>
@@ -4337,7 +4337,7 @@
                             <a:srgbClr val="0B0E14"/>
                           </a:solidFill>
                         </a:rPr>
-                        <a:t>75%</a:t>
+                        <a:t>상위 25%</a:t>
                       </a:r>
                       <a:endParaRPr lang="en-US" sz="1200" dirty="0"/>
                     </a:p>
@@ -4532,7 +4532,7 @@
                   <a:schemeClr val="tx1"/>
                 </a:solidFill>
               </a:rPr>
-              <a:t>스케일이 20배 넘게 달라 기준을 단위별로 따로 둔다.</a:t>
+              <a:t>스케일이 20배 넘게 달라 단위별로 기준을 따로 둡니다.</a:t>
             </a:r>
             <a:endParaRPr lang="en-US" sz="1100" dirty="0"/>
           </a:p>
@@ -4546,7 +4546,7 @@
                   <a:schemeClr val="accent6"/>
                 </a:solidFill>
               </a:rPr>
-              <a:t>분봉 하한을 25%ile(1.38%)이 아니라 2.5% 로 올렸다 — 1.5% 면 배율 10 을 걸어도 자산 변동이 15% 뿐이라 4분짜리 판이 밋밋하다</a:t>
+              <a:t>분봉 하한은 하위 25%(1.38%)가 아닌 2.5%로 상향. 1.5%면 배율 10에서도 자산 변동이 15%에 그쳐 4분 판이 밋밋함</a:t>
             </a:r>
             <a:endParaRPr lang="en-US" sz="1100" dirty="0"/>
           </a:p>
@@ -4654,7 +4654,7 @@
                   <a:schemeClr val="tx1"/>
                 </a:solidFill>
               </a:rPr>
-              <a:t>실측이 바꾼 결정 — 밸런스는 시나리오로 맞춘다</a:t>
+              <a:t>밸런스는 배율이 아니라 시나리오로 맞춥니다</a:t>
             </a:r>
             <a:endParaRPr lang="en-US" sz="3000" dirty="0"/>
           </a:p>
@@ -4692,7 +4692,7 @@
                   <a:schemeClr val="accent6"/>
                 </a:solidFill>
               </a:rPr>
-              <a:t>240봉 구간을 한 봉씩 밀어 가며 전수 계산 — 청산이 한 번이라도 나는 구간의 비율</a:t>
+              <a:t>240봉 구간을 한 봉씩 밀어 가며, 청산이 한 번이라도 나는 구간의 비율을 전부 셌습니다</a:t>
             </a:r>
             <a:endParaRPr lang="en-US" sz="1400" dirty="0"/>
           </a:p>
@@ -5731,7 +5731,7 @@
                   <a:schemeClr val="tx1"/>
                 </a:solidFill>
               </a:rPr>
-              <a:t>분봉은 ×20 까지 청산 0%</a:t>
+              <a:t>분봉은 ×20까지 청산 0%</a:t>
             </a:r>
             <a:endParaRPr lang="en-US" sz="1400" dirty="0"/>
           </a:p>
@@ -5767,7 +5767,7 @@
                   <a:schemeClr val="accent6"/>
                 </a:solidFill>
               </a:rPr>
-              <a:t>하루 시가 → 저가 −10% 이하는</a:t>
+              <a:t>하루 시가 대비 저가 −10% 이하는</a:t>
             </a:r>
             <a:endParaRPr lang="en-US" sz="1100" dirty="0"/>
           </a:p>
@@ -5781,7 +5781,7 @@
                   <a:schemeClr val="accent6"/>
                 </a:solidFill>
               </a:rPr>
-              <a:t>169일에 한 번. 배율을 올려도</a:t>
+              <a:t>169일에 한 번</a:t>
             </a:r>
             <a:endParaRPr lang="en-US" sz="1100" dirty="0"/>
           </a:p>
@@ -5795,7 +5795,7 @@
                   <a:schemeClr val="accent6"/>
                 </a:solidFill>
               </a:rPr>
-              <a:t>「망할 위험」이 생기지 않는다</a:t>
+              <a:t>배율을 올려도 손실 위험이 생기지 않음</a:t>
             </a:r>
             <a:endParaRPr lang="en-US" sz="1100" dirty="0"/>
           </a:p>
@@ -5887,7 +5887,7 @@
                   <a:schemeClr val="tx1"/>
                 </a:solidFill>
               </a:rPr>
-              <a:t>종목 차이가 배율 차이보다 크다</a:t>
+              <a:t>종목 차이가 배율 차이보다 큼</a:t>
             </a:r>
             <a:endParaRPr lang="en-US" sz="1400" dirty="0"/>
           </a:p>
@@ -5923,7 +5923,7 @@
                   <a:schemeClr val="accent6"/>
                 </a:solidFill>
               </a:rPr>
-              <a:t>−5% 기준 에코프로비엠 11.89%</a:t>
+              <a:t>−5% 기준 에코프로비엠 11.89%,</a:t>
             </a:r>
             <a:endParaRPr lang="en-US" sz="1100" dirty="0"/>
           </a:p>
@@ -5937,7 +5937,7 @@
                   <a:schemeClr val="accent6"/>
                 </a:solidFill>
               </a:rPr>
-              <a:t>vs 삼성전자 1.60% — 7배</a:t>
+              <a:t>삼성전자 1.60%로 약 7배</a:t>
             </a:r>
             <a:endParaRPr lang="en-US" sz="1100" dirty="0"/>
           </a:p>
@@ -6029,7 +6029,7 @@
                   <a:schemeClr val="tx1"/>
                 </a:solidFill>
               </a:rPr>
-              <a:t>그래서 시나리오를 고른다</a:t>
+              <a:t>그래서 변동이 큰 구간을 고릅니다</a:t>
             </a:r>
             <a:endParaRPr lang="en-US" sz="1400" dirty="0"/>
           </a:p>
@@ -6065,7 +6065,7 @@
                   <a:schemeClr val="accent6"/>
                 </a:solidFill>
               </a:rPr>
-              <a:t>평범한 날 대신 변동이 큰 구간을</a:t>
+              <a:t>평범한 날 대신 변동이 큰 구간 선택</a:t>
             </a:r>
             <a:endParaRPr lang="en-US" sz="1100" dirty="0"/>
           </a:p>
@@ -6079,7 +6079,7 @@
                   <a:schemeClr val="accent6"/>
                 </a:solidFill>
               </a:rPr>
-              <a:t>고른다 → 적격성 검사의 이동폭 하한</a:t>
+              <a:t>적격성 검사의 이동폭 하한으로 반영</a:t>
             </a:r>
             <a:endParaRPr lang="en-US" sz="1100" dirty="0"/>
           </a:p>
@@ -6225,7 +6225,7 @@
                   <a:schemeClr val="bg1"/>
                 </a:solidFill>
               </a:rPr>
-              <a:t>지금까지 확인한 것</a:t>
+              <a:t>지금까지 이렇게 확인했습니다</a:t>
             </a:r>
             <a:endParaRPr lang="en-US" sz="3200" dirty="0"/>
           </a:p>
@@ -6296,7 +6296,7 @@
         <p:spPr>
           <a:xfrm>
             <a:off x="1051560" y="1746504"/>
-            <a:ext cx="4937760" cy="310896"/>
+            <a:ext cx="5029200" cy="310896"/>
           </a:xfrm>
           <a:prstGeom prst="rect">
             <a:avLst/>
@@ -6312,14 +6312,14 @@
               <a:buNone/>
             </a:pPr>
             <a:r>
-              <a:rPr lang="en-US" sz="1700" b="1" dirty="0">
+              <a:rPr lang="en-US" sz="1600" b="1" dirty="0">
                 <a:solidFill>
                   <a:schemeClr val="bg1"/>
                 </a:solidFill>
               </a:rPr>
-              <a:t>데이터 조건 네 가지를 실측으로 확인했다</a:t>
-            </a:r>
-            <a:endParaRPr lang="en-US" sz="1700" dirty="0"/>
+              <a:t>데이터 조건 네 가지를 실측으로 확인했습니다</a:t>
+            </a:r>
+            <a:endParaRPr lang="en-US" sz="1600" dirty="0"/>
           </a:p>
         </p:txBody>
       </p:sp>
@@ -6332,7 +6332,7 @@
         <p:spPr>
           <a:xfrm>
             <a:off x="1051560" y="2084832"/>
-            <a:ext cx="4937760" cy="274320"/>
+            <a:ext cx="5029200" cy="274320"/>
           </a:xfrm>
           <a:prstGeom prst="rect">
             <a:avLst/>
@@ -6353,7 +6353,7 @@
                   <a:schemeClr val="bg2"/>
                 </a:solidFill>
               </a:rPr>
-              <a:t>수정주가 · 조회 범위 · 거래량 0 봉 · 변동폭</a:t>
+              <a:t>수정주가, 조회 범위, 무거래 봉, 변동폭</a:t>
             </a:r>
             <a:endParaRPr lang="en-US" sz="1200" dirty="0"/>
           </a:p>
@@ -6424,7 +6424,7 @@
         <p:spPr>
           <a:xfrm>
             <a:off x="1051560" y="2615184"/>
-            <a:ext cx="4937760" cy="310896"/>
+            <a:ext cx="5029200" cy="310896"/>
           </a:xfrm>
           <a:prstGeom prst="rect">
             <a:avLst/>
@@ -6440,14 +6440,14 @@
               <a:buNone/>
             </a:pPr>
             <a:r>
-              <a:rPr lang="en-US" sz="1700" b="1" dirty="0">
+              <a:rPr lang="en-US" sz="1600" b="1" dirty="0">
                 <a:solidFill>
                   <a:schemeClr val="bg1"/>
                 </a:solidFill>
               </a:rPr>
-              <a:t>수집을 막은 문제 세 가지를 해결했다</a:t>
-            </a:r>
-            <a:endParaRPr lang="en-US" sz="1700" dirty="0"/>
+              <a:t>수집을 막은 문제 세 가지를 해결했습니다</a:t>
+            </a:r>
+            <a:endParaRPr lang="en-US" sz="1600" dirty="0"/>
           </a:p>
         </p:txBody>
       </p:sp>
@@ -6460,7 +6460,7 @@
         <p:spPr>
           <a:xfrm>
             <a:off x="1051560" y="2953512"/>
-            <a:ext cx="4937760" cy="274320"/>
+            <a:ext cx="5029200" cy="274320"/>
           </a:xfrm>
           <a:prstGeom prst="rect">
             <a:avLst/>
@@ -6481,7 +6481,7 @@
                   <a:schemeClr val="bg2"/>
                 </a:solidFill>
               </a:rPr>
-              <a:t>연속 요청 차단 · 토큰 무효 · IP 제한</a:t>
+              <a:t>연속 요청 차단, 토큰 무효, IP 제한</a:t>
             </a:r>
             <a:endParaRPr lang="en-US" sz="1200" dirty="0"/>
           </a:p>
@@ -6552,7 +6552,7 @@
         <p:spPr>
           <a:xfrm>
             <a:off x="1051560" y="3483864"/>
-            <a:ext cx="4937760" cy="310896"/>
+            <a:ext cx="5029200" cy="310896"/>
           </a:xfrm>
           <a:prstGeom prst="rect">
             <a:avLst/>
@@ -6568,14 +6568,14 @@
               <a:buNone/>
             </a:pPr>
             <a:r>
-              <a:rPr lang="en-US" sz="1700" b="1" dirty="0">
+              <a:rPr lang="en-US" sz="1600" b="1" dirty="0">
                 <a:solidFill>
                   <a:schemeClr val="bg1"/>
                 </a:solidFill>
               </a:rPr>
-              <a:t>게임 구간을 고르는 기준을 숫자로 정했다</a:t>
-            </a:r>
-            <a:endParaRPr lang="en-US" sz="1700" dirty="0"/>
+              <a:t>게임 구간을 고르는 기준을 숫자로 정했습니다</a:t>
+            </a:r>
+            <a:endParaRPr lang="en-US" sz="1600" dirty="0"/>
           </a:p>
         </p:txBody>
       </p:sp>
@@ -6588,7 +6588,7 @@
         <p:spPr>
           <a:xfrm>
             <a:off x="1051560" y="3822192"/>
-            <a:ext cx="4937760" cy="274320"/>
+            <a:ext cx="5029200" cy="274320"/>
           </a:xfrm>
           <a:prstGeom prst="rect">
             <a:avLst/>
@@ -6609,7 +6609,7 @@
                   <a:schemeClr val="bg2"/>
                 </a:solidFill>
               </a:rPr>
-              <a:t>정규장 09:01 ~ 15:20 · 적격성 검사 · 배율별 청산</a:t>
+              <a:t>정규장 09:01 ~ 15:20, 적격성 검사, 배율별 청산 분석</a:t>
             </a:r>
             <a:endParaRPr lang="en-US" sz="1200" dirty="0"/>
           </a:p>
@@ -6681,7 +6681,7 @@
                   <a:srgbClr val="F2F3F7"/>
                 </a:solidFill>
               </a:rPr>
-              <a:t>저장해 둔 데이터가 2년 8개월치</a:t>
+              <a:t>저장 데이터 2년 8개월치, 3종목</a:t>
             </a:r>
             <a:endParaRPr lang="en-US" sz="1400" dirty="0"/>
           </a:p>
@@ -6695,7 +6695,7 @@
                   <a:srgbClr val="F2F3F7"/>
                 </a:solidFill>
               </a:rPr>
-              <a:t>3종목이라 겹치지 않는 판이</a:t>
+              <a:t>겹치지 않는 판은</a:t>
             </a:r>
             <a:endParaRPr lang="en-US" sz="1400" dirty="0"/>
           </a:p>
@@ -6709,7 +6709,7 @@
                   <a:srgbClr val="F2F3F7"/>
                 </a:solidFill>
               </a:rPr>
-              <a:t>일봉 2개 · 분봉 6개뿐</a:t>
+              <a:t>일봉 2개, 분봉 6개</a:t>
             </a:r>
             <a:endParaRPr lang="en-US" sz="1400" dirty="0"/>
           </a:p>
@@ -6767,7 +6767,7 @@
                   <a:schemeClr val="bg1"/>
                 </a:solidFill>
               </a:rPr>
-              <a:t>한 줄로</a:t>
+              <a:t>한 줄 요약</a:t>
             </a:r>
             <a:endParaRPr lang="en-US" sz="1400" dirty="0"/>
           </a:p>
@@ -6795,7 +6795,7 @@
                   <a:schemeClr val="bg1"/>
                 </a:solidFill>
               </a:rPr>
-              <a:t>실측으로 정했다</a:t>
+              <a:t>실측으로 정했습니다</a:t>
             </a:r>
             <a:endParaRPr lang="en-US" sz="1400" dirty="0"/>
           </a:p>
@@ -6858,7 +6858,7 @@
                   <a:schemeClr val="tx1"/>
                 </a:solidFill>
               </a:rPr>
-              <a:t>어떤 게임인가요</a:t>
+              <a:t>머니게임은 이런 게임입니다</a:t>
             </a:r>
             <a:endParaRPr lang="en-US" sz="3000" dirty="0"/>
           </a:p>
@@ -6998,7 +6998,7 @@
                   <a:schemeClr val="tx1"/>
                 </a:solidFill>
               </a:rPr>
-              <a:t>1. 방에 모인다</a:t>
+              <a:t>1. 방 입장</a:t>
             </a:r>
             <a:endParaRPr lang="en-US" sz="1500" dirty="0"/>
           </a:p>
@@ -7034,7 +7034,7 @@
                   <a:schemeClr val="accent6"/>
                 </a:solidFill>
               </a:rPr>
-              <a:t>여러 명이 한 방에서,</a:t>
+              <a:t>여러 명이 한 방에서</a:t>
             </a:r>
             <a:endParaRPr lang="en-US" sz="1200" dirty="0"/>
           </a:p>
@@ -7048,7 +7048,7 @@
                   <a:schemeClr val="accent6"/>
                 </a:solidFill>
               </a:rPr>
-              <a:t>혼자면 봇과 겨룬다</a:t>
+              <a:t>혼자면 봇과 대결</a:t>
             </a:r>
             <a:endParaRPr lang="en-US" sz="1200" dirty="0"/>
           </a:p>
@@ -7386,7 +7386,7 @@
                   <a:schemeClr val="accent6"/>
                 </a:solidFill>
               </a:rPr>
-              <a:t>손익이 커지는 만큼</a:t>
+              <a:t>손익 확대</a:t>
             </a:r>
             <a:endParaRPr lang="en-US" sz="1200" dirty="0"/>
           </a:p>
@@ -7400,7 +7400,7 @@
                   <a:schemeClr val="accent6"/>
                 </a:solidFill>
               </a:rPr>
-              <a:t>청산 위험도 커진다</a:t>
+              <a:t>대신 청산 위험</a:t>
             </a:r>
             <a:endParaRPr lang="en-US" sz="1200" dirty="0"/>
           </a:p>
@@ -7526,7 +7526,7 @@
                   <a:schemeClr val="tx1"/>
                 </a:solidFill>
               </a:rPr>
-              <a:t>4. 자산으로 순위</a:t>
+              <a:t>4. 자산 순위</a:t>
             </a:r>
             <a:endParaRPr lang="en-US" sz="1500" dirty="0"/>
           </a:p>
@@ -7562,7 +7562,7 @@
                   <a:schemeClr val="accent6"/>
                 </a:solidFill>
               </a:rPr>
-              <a:t>끝나면 실제 종목과</a:t>
+              <a:t>종료 후 실제 종목과</a:t>
             </a:r>
             <a:endParaRPr lang="en-US" sz="1200" dirty="0"/>
           </a:p>
@@ -7576,7 +7576,7 @@
                   <a:schemeClr val="accent6"/>
                 </a:solidFill>
               </a:rPr>
-              <a:t>기간을 공개한다</a:t>
+              <a:t>기간 공개</a:t>
             </a:r>
             <a:endParaRPr lang="en-US" sz="1200" dirty="0"/>
           </a:p>
@@ -7648,7 +7648,7 @@
                   <a:schemeClr val="accent6"/>
                 </a:solidFill>
               </a:rPr>
-              <a:t>= 캔들 1개. 과거 시세를 압축 재생</a:t>
+              <a:t>캔들 1개, 과거 시세 압축 재생</a:t>
             </a:r>
             <a:endParaRPr lang="en-US" sz="1200" dirty="0"/>
           </a:p>
@@ -7720,7 +7720,7 @@
                   <a:schemeClr val="accent6"/>
                 </a:solidFill>
               </a:rPr>
-              <a:t>한 판의 길이 (캔들 240개)</a:t>
+              <a:t>한 판 길이 (캔들 240개)</a:t>
             </a:r>
             <a:endParaRPr lang="en-US" sz="1200" dirty="0"/>
           </a:p>
@@ -7756,7 +7756,7 @@
                   <a:schemeClr val="accent1"/>
                 </a:solidFill>
               </a:rPr>
-              <a:t>A · B · C</a:t>
+              <a:t>A, B, C</a:t>
             </a:r>
             <a:endParaRPr lang="en-US" sz="3200" dirty="0"/>
           </a:p>
@@ -7792,7 +7792,7 @@
                   <a:schemeClr val="accent6"/>
                 </a:solidFill>
               </a:rPr>
-              <a:t>게임 중에는 종목 이름을 가린다</a:t>
+              <a:t>게임 중 종목 이름 비공개</a:t>
             </a:r>
             <a:endParaRPr lang="en-US" sz="1200" dirty="0"/>
           </a:p>
@@ -7900,7 +7900,7 @@
                   <a:schemeClr val="tx1"/>
                 </a:solidFill>
               </a:rPr>
-              <a:t>게임에 쓸 데이터의 조건</a:t>
+              <a:t>데이터는 네 가지 조건을 갖춰야 합니다</a:t>
             </a:r>
             <a:endParaRPr lang="en-US" sz="3000" dirty="0"/>
           </a:p>
@@ -7938,7 +7938,7 @@
                   <a:schemeClr val="accent6"/>
                 </a:solidFill>
               </a:rPr>
-              <a:t>실제 시세를 게임에 쓰려면 네 가지가 필요했습니다. 이후 내용은 이것을 하나씩 확인한 과정입니다</a:t>
+              <a:t>실제 시세를 게임에 쓰려면 네 가지가 필요했습니다. 이후 내용은 이 조건을 하나씩 확인한 과정입니다</a:t>
             </a:r>
             <a:endParaRPr lang="en-US" sz="1400" dirty="0"/>
           </a:p>
@@ -8040,7 +8040,7 @@
                   <a:schemeClr val="tx1"/>
                 </a:solidFill>
               </a:rPr>
-              <a:t>진짜 가격이어야 한다</a:t>
+              <a:t>진짜 가격이어야 합니다</a:t>
             </a:r>
             <a:endParaRPr lang="en-US" sz="1600" dirty="0"/>
           </a:p>
@@ -8112,7 +8112,7 @@
                   <a:schemeClr val="accent6"/>
                 </a:solidFill>
               </a:rPr>
-              <a:t>액면분할 같은 사건이 반영된 수정주가</a:t>
+              <a:t>액면분할 등이 반영된 수정주가</a:t>
             </a:r>
             <a:endParaRPr lang="en-US" sz="1200" dirty="0"/>
           </a:p>
@@ -8126,7 +8126,7 @@
                   <a:schemeClr val="accent6"/>
                 </a:solidFill>
               </a:rPr>
-              <a:t>삼성전자 분할(50:1) 전후 정확히 50배 차이</a:t>
+              <a:t>삼성전자 분할(50:1) 전후 정확히 50배 차이 확인</a:t>
             </a:r>
             <a:endParaRPr lang="en-US" sz="1200" dirty="0"/>
           </a:p>
@@ -8228,7 +8228,7 @@
                   <a:schemeClr val="tx1"/>
                 </a:solidFill>
               </a:rPr>
-              <a:t>고를 구간이 충분해야 한다</a:t>
+              <a:t>고를 구간이 충분해야 합니다</a:t>
             </a:r>
             <a:endParaRPr lang="en-US" sz="1600" dirty="0"/>
           </a:p>
@@ -8264,7 +8264,7 @@
                   <a:schemeClr val="accent1"/>
                 </a:solidFill>
               </a:rPr>
-              <a:t>→ 조회 범위 실측</a:t>
+              <a:t>조회 범위 실측</a:t>
             </a:r>
             <a:endParaRPr lang="en-US" sz="1100" dirty="0"/>
           </a:p>
@@ -8300,7 +8300,7 @@
                   <a:schemeClr val="accent6"/>
                 </a:solidFill>
               </a:rPr>
-              <a:t>같은 판이 반복되지 않으려면</a:t>
+              <a:t>같은 판 반복을 피하려면</a:t>
             </a:r>
             <a:endParaRPr lang="en-US" sz="1200" dirty="0"/>
           </a:p>
@@ -8314,7 +8314,7 @@
                   <a:schemeClr val="accent6"/>
                 </a:solidFill>
               </a:rPr>
-              <a:t>받을 수 있는 기간이 길어야 한다</a:t>
+              <a:t>긴 조회 기간 필요</a:t>
             </a:r>
             <a:endParaRPr lang="en-US" sz="1200" dirty="0"/>
           </a:p>
@@ -8416,7 +8416,7 @@
                   <a:schemeClr val="tx1"/>
                 </a:solidFill>
               </a:rPr>
-              <a:t>멈추지 않아야 한다</a:t>
+              <a:t>멈추지 않아야 합니다</a:t>
             </a:r>
             <a:endParaRPr lang="en-US" sz="1600" dirty="0"/>
           </a:p>
@@ -8452,7 +8452,7 @@
                   <a:schemeClr val="accent1"/>
                 </a:solidFill>
               </a:rPr>
-              <a:t>→ 거래량 0 봉 분석</a:t>
+              <a:t>무거래 봉 분석</a:t>
             </a:r>
             <a:endParaRPr lang="en-US" sz="1100" dirty="0"/>
           </a:p>
@@ -8488,7 +8488,7 @@
                   <a:schemeClr val="accent6"/>
                 </a:solidFill>
               </a:rPr>
-              <a:t>1초에 캔들 하나라, 거래 없는 봉은</a:t>
+              <a:t>1초에 캔들 1개라</a:t>
             </a:r>
             <a:endParaRPr lang="en-US" sz="1200" dirty="0"/>
           </a:p>
@@ -8502,7 +8502,7 @@
                   <a:schemeClr val="accent6"/>
                 </a:solidFill>
               </a:rPr>
-              <a:t>화면이 멈춘 것처럼 보인다</a:t>
+              <a:t>거래 없는 봉은 화면 정지로 보임</a:t>
             </a:r>
             <a:endParaRPr lang="en-US" sz="1200" dirty="0"/>
           </a:p>
@@ -8604,7 +8604,7 @@
                   <a:schemeClr val="tx1"/>
                 </a:solidFill>
               </a:rPr>
-              <a:t>움직임이 있어야 한다</a:t>
+              <a:t>움직임이 있어야 합니다</a:t>
             </a:r>
             <a:endParaRPr lang="en-US" sz="1600" dirty="0"/>
           </a:p>
@@ -8640,7 +8640,7 @@
                   <a:schemeClr val="accent1"/>
                 </a:solidFill>
               </a:rPr>
-              <a:t>→ 변동폭 · 청산 분석</a:t>
+              <a:t>변동폭과 청산 분석</a:t>
             </a:r>
             <a:endParaRPr lang="en-US" sz="1100" dirty="0"/>
           </a:p>
@@ -8676,7 +8676,7 @@
                   <a:schemeClr val="accent6"/>
                 </a:solidFill>
               </a:rPr>
-              <a:t>가격이 잔잔하면 판단할 거리가 없다.</a:t>
+              <a:t>가격이 잔잔하면 판단할 거리가 없음</a:t>
             </a:r>
             <a:endParaRPr lang="en-US" sz="1200" dirty="0"/>
           </a:p>
@@ -8690,7 +8690,7 @@
                   <a:schemeClr val="accent6"/>
                 </a:solidFill>
               </a:rPr>
-              <a:t>배율을 걸어도 위험이 생기지 않는다</a:t>
+              <a:t>배율을 걸어도 위험이 생기지 않음</a:t>
             </a:r>
             <a:endParaRPr lang="en-US" sz="1200" dirty="0"/>
           </a:p>
@@ -8798,7 +8798,7 @@
                   <a:schemeClr val="tx1"/>
                 </a:solidFill>
               </a:rPr>
-              <a:t>데이터는 미리 받아 두고, 게임은 저장된 것만 쓴다</a:t>
+              <a:t>데이터는 미리 받아 두고 게임은 저장본만 씁니다</a:t>
             </a:r>
             <a:endParaRPr lang="en-US" sz="3000" dirty="0"/>
           </a:p>
@@ -8836,7 +8836,7 @@
                   <a:schemeClr val="accent6"/>
                 </a:solidFill>
               </a:rPr>
-              <a:t>게임이 도는 동안에는 외부 API 를 부르지 않습니다</a:t>
+              <a:t>게임이 도는 동안에는 외부 API를 부르지 않습니다</a:t>
             </a:r>
             <a:endParaRPr lang="en-US" sz="1400" dirty="0"/>
           </a:p>
@@ -8930,7 +8930,7 @@
                   <a:schemeClr val="accent6"/>
                 </a:solidFill>
               </a:rPr>
-              <a:t>실제 시세 (일봉 · 분봉)</a:t>
+              <a:t>실제 시세 (일봉, 분봉)</a:t>
             </a:r>
             <a:endParaRPr lang="en-US" sz="1100" dirty="0"/>
           </a:p>
@@ -9118,7 +9118,7 @@
                   <a:schemeClr val="bg2"/>
                 </a:solidFill>
               </a:rPr>
-              <a:t>시세 · 게임 구간</a:t>
+              <a:t>시세, 게임 구간</a:t>
             </a:r>
             <a:endParaRPr lang="en-US" sz="1100" dirty="0"/>
           </a:p>
@@ -9212,7 +9212,7 @@
                   <a:schemeClr val="accent6"/>
                 </a:solidFill>
               </a:rPr>
-              <a:t>판 시작 때 한 번 읽기</a:t>
+              <a:t>판 시작 시 1회 읽기</a:t>
             </a:r>
             <a:endParaRPr lang="en-US" sz="1100" dirty="0"/>
           </a:p>
@@ -9386,7 +9386,7 @@
                   <a:schemeClr val="tx1"/>
                 </a:solidFill>
               </a:rPr>
-              <a:t>시세 조회만 쓴다</a:t>
+              <a:t>시세 조회 기능만 씁니다</a:t>
             </a:r>
             <a:endParaRPr lang="en-US" sz="1600" dirty="0"/>
           </a:p>
@@ -9422,7 +9422,7 @@
                   <a:schemeClr val="accent6"/>
                 </a:solidFill>
               </a:rPr>
-              <a:t>이 API 는 실계좌 주문까지 열린다.</a:t>
+              <a:t>실계좌 주문까지 가능한 API</a:t>
             </a:r>
             <a:endParaRPr lang="en-US" sz="1200" dirty="0"/>
           </a:p>
@@ -9436,7 +9436,7 @@
                   <a:schemeClr val="accent6"/>
                 </a:solidFill>
               </a:rPr>
-              <a:t>주문 · 계좌 · 잔고 기능은 어떤 경우에도 부르지 않는다</a:t>
+              <a:t>주문, 계좌, 잔고 기능은 호출 금지</a:t>
             </a:r>
             <a:endParaRPr lang="en-US" sz="1200" dirty="0"/>
           </a:p>
@@ -9538,7 +9538,7 @@
                   <a:schemeClr val="tx1"/>
                 </a:solidFill>
               </a:rPr>
-              <a:t>게임 중에는 바깥을 부르지 않는다</a:t>
+              <a:t>게임 중엔 외부 호출이 없습니다</a:t>
             </a:r>
             <a:endParaRPr lang="en-US" sz="1600" dirty="0"/>
           </a:p>
@@ -9574,7 +9574,7 @@
                   <a:schemeClr val="accent6"/>
                 </a:solidFill>
               </a:rPr>
-              <a:t>판 시작 때 시세를 한 번 읽고 진행은 서버 안에서만.</a:t>
+              <a:t>판 시작 시 시세 1회 읽기, 진행은 서버 안에서만</a:t>
             </a:r>
             <a:endParaRPr lang="en-US" sz="1200" dirty="0"/>
           </a:p>
@@ -9588,7 +9588,7 @@
                   <a:schemeClr val="accent6"/>
                 </a:solidFill>
               </a:rPr>
-              <a:t>네트워크 · DB 지연이 게임 진행에 끼어들지 않는다</a:t>
+              <a:t>네트워크와 DB 지연이 게임에 영향 없음</a:t>
             </a:r>
             <a:endParaRPr lang="en-US" sz="1200" dirty="0"/>
           </a:p>
@@ -9696,7 +9696,7 @@
                   <a:schemeClr val="tx1"/>
                 </a:solidFill>
               </a:rPr>
-              <a:t>실측 ① 얼마나 오래된 시세까지 받을 수 있나</a:t>
+              <a:t>실측 ① 조회 가능 기간은 생각보다 깁니다</a:t>
             </a:r>
             <a:endParaRPr lang="en-US" sz="3000" dirty="0"/>
           </a:p>
@@ -9806,7 +9806,7 @@
                   <a:schemeClr val="tx1"/>
                 </a:solidFill>
               </a:rPr>
-              <a:t>일봉 — 1975-06-12부터</a:t>
+              <a:t>일봉, 1975-06-12부터</a:t>
             </a:r>
             <a:endParaRPr lang="en-US" sz="1600" dirty="0"/>
           </a:p>
@@ -9842,7 +9842,7 @@
                   <a:schemeClr val="accent6"/>
                 </a:solidFill>
               </a:rPr>
-              <a:t>13,735봉 · 마지막 페이지까지 확인 (경계 확정)</a:t>
+              <a:t>13,735봉, 마지막 페이지까지 확인 (경계 확정)</a:t>
             </a:r>
             <a:endParaRPr lang="en-US" sz="1200" dirty="0"/>
           </a:p>
@@ -9914,7 +9914,7 @@
                   <a:schemeClr val="tx1"/>
                 </a:solidFill>
               </a:rPr>
-              <a:t>분봉 — 2022-04-19 이전부터</a:t>
+              <a:t>분봉, 2022-04-19 이전부터</a:t>
             </a:r>
             <a:endParaRPr lang="en-US" sz="1600" dirty="0"/>
           </a:p>
@@ -9950,7 +9950,7 @@
                   <a:schemeClr val="accent6"/>
                 </a:solidFill>
               </a:rPr>
-              <a:t>775,000봉+ · 3,000번 요청해도 끝 미도달</a:t>
+              <a:t>775,000봉 이상, 3,000회 요청에도 끝 미도달</a:t>
             </a:r>
             <a:endParaRPr lang="en-US" sz="1200" dirty="0"/>
           </a:p>
@@ -10336,7 +10336,7 @@
                   <a:schemeClr val="tx1"/>
                 </a:solidFill>
               </a:rPr>
-              <a:t>「1분봉은 최근 몇 주치만 남는다」는 통념은 틀렸다</a:t>
+              <a:t>“1분봉은 최근 몇 주치만 남는다”는 통념과 달랐습니다</a:t>
             </a:r>
             <a:endParaRPr lang="en-US" sz="1400" dirty="0"/>
           </a:p>
@@ -10350,7 +10350,7 @@
                   <a:schemeClr val="accent6"/>
                 </a:solidFill>
               </a:rPr>
-              <a:t>→ 서둘러 쌓을 필요가 없다. 분봉 4년치는 요청 3,000번 · 68분이라, 게임에 쓸 구간만 골라 받으면 된다</a:t>
+              <a:t>서둘러 쌓을 필요 없음. 분봉 4년치는 요청 3,000회, 약 68분 소요라 필요한 구간만 수집</a:t>
             </a:r>
             <a:endParaRPr lang="en-US" sz="1400" dirty="0"/>
           </a:p>
@@ -10458,7 +10458,7 @@
                   <a:schemeClr val="tx1"/>
                 </a:solidFill>
               </a:rPr>
-              <a:t>실측 ② 수집을 멈춰 세운 문제 세 가지</a:t>
+              <a:t>실측 ② 수집 중 세 가지 문제를 만났습니다</a:t>
             </a:r>
             <a:endParaRPr lang="en-US" sz="3000" dirty="0"/>
           </a:p>
@@ -10670,7 +10670,7 @@
                   <a:schemeClr val="accent6"/>
                 </a:solidFill>
               </a:rPr>
-              <a:t>평균 속도가 느려도 연속으로</a:t>
+              <a:t>평균 속도가 느려도</a:t>
             </a:r>
             <a:endParaRPr lang="en-US" sz="1100" dirty="0"/>
           </a:p>
@@ -10684,7 +10684,7 @@
                   <a:schemeClr val="accent6"/>
                 </a:solidFill>
               </a:rPr>
-              <a:t>몰아서 보내면 막히는 방식</a:t>
+              <a:t>연속 요청이 몰리면 차단</a:t>
             </a:r>
             <a:endParaRPr lang="en-US" sz="1100" dirty="0"/>
           </a:p>
@@ -10698,7 +10698,7 @@
                   <a:schemeClr val="accent6"/>
                 </a:solidFill>
               </a:rPr>
-              <a:t>(쌓아 둔 횟수를 쓰는 토큰 버킷)</a:t>
+              <a:t>(쌓인 횟수를 쓰는 토큰 버킷 방식)</a:t>
             </a:r>
             <a:endParaRPr lang="en-US" sz="1100" dirty="0"/>
           </a:p>
@@ -10734,7 +10734,7 @@
                   <a:schemeClr val="tx1"/>
                 </a:solidFill>
               </a:rPr>
-              <a:t>요청 사이에 0.3초 →</a:t>
+              <a:t>요청 간격 0.3초로</a:t>
             </a:r>
             <a:endParaRPr lang="en-US" sz="1200" dirty="0"/>
           </a:p>
@@ -10748,7 +10748,7 @@
                   <a:schemeClr val="tx1"/>
                 </a:solidFill>
               </a:rPr>
-              <a:t>1,800번 연속 무사고</a:t>
+              <a:t>1,800회 연속 수집 성공</a:t>
             </a:r>
             <a:endParaRPr lang="en-US" sz="1200" dirty="0"/>
           </a:p>
@@ -10922,7 +10922,7 @@
                   <a:schemeClr val="accent6"/>
                 </a:solidFill>
               </a:rPr>
-              <a:t>인증 토큰은 하나만 유효.</a:t>
+              <a:t>유효한 인증 토큰은 하나뿐</a:t>
             </a:r>
             <a:endParaRPr lang="en-US" sz="1100" dirty="0"/>
           </a:p>
@@ -10936,7 +10936,7 @@
                   <a:schemeClr val="accent6"/>
                 </a:solidFill>
               </a:rPr>
-              <a:t>수집을 두 개 동시에 돌리자</a:t>
+              <a:t>수집 두 개를 동시에 돌리자</a:t>
             </a:r>
             <a:endParaRPr lang="en-US" sz="1100" dirty="0"/>
           </a:p>
@@ -10950,7 +10950,7 @@
                   <a:schemeClr val="accent6"/>
                 </a:solidFill>
               </a:rPr>
-              <a:t>서로의 토큰을 무효로 만들었다</a:t>
+              <a:t>서로의 토큰이 무효화</a:t>
             </a:r>
             <a:endParaRPr lang="en-US" sz="1100" dirty="0"/>
           </a:p>
@@ -10986,7 +10986,7 @@
                   <a:schemeClr val="tx1"/>
                 </a:solidFill>
               </a:rPr>
-              <a:t>토큰을 재사용하고,</a:t>
+              <a:t>토큰 재사용,</a:t>
             </a:r>
             <a:endParaRPr lang="en-US" sz="1200" dirty="0"/>
           </a:p>
@@ -11174,7 +11174,7 @@
                   <a:schemeClr val="accent6"/>
                 </a:solidFill>
               </a:rPr>
-              <a:t>등록한 IP 에서만 쓸 수 있다.</a:t>
+              <a:t>등록된 IP에서만 사용 가능</a:t>
             </a:r>
             <a:endParaRPr lang="en-US" sz="1100" dirty="0"/>
           </a:p>
@@ -11202,7 +11202,7 @@
                   <a:schemeClr val="accent6"/>
                 </a:solidFill>
               </a:rPr>
-              <a:t>인증부터 막혔다</a:t>
+              <a:t>인증부터 차단</a:t>
             </a:r>
             <a:endParaRPr lang="en-US" sz="1100" dirty="0"/>
           </a:p>
@@ -11252,7 +11252,7 @@
                   <a:schemeClr val="tx1"/>
                 </a:solidFill>
               </a:rPr>
-              <a:t>IP 부터 등록</a:t>
+              <a:t>IP 먼저 등록</a:t>
             </a:r>
             <a:endParaRPr lang="en-US" sz="1200" dirty="0"/>
           </a:p>
@@ -11360,7 +11360,7 @@
                   <a:schemeClr val="tx1"/>
                 </a:solidFill>
               </a:rPr>
-              <a:t>지금 확보한 데이터</a:t>
+              <a:t>데이터는 이만큼 확보했습니다</a:t>
             </a:r>
             <a:endParaRPr lang="en-US" sz="3000" dirty="0"/>
           </a:p>
@@ -11434,7 +11434,7 @@
                   <a:schemeClr val="tx1"/>
                 </a:solidFill>
               </a:rPr>
-              <a:t>종목 3개 — 1주 가격이 수만 원부터 백만 원대까지 다르다</a:t>
+              <a:t>종목 3개, 1주 가격 수만 원부터 백만 원대까지</a:t>
             </a:r>
             <a:endParaRPr lang="en-US" sz="1300" dirty="0"/>
           </a:p>
@@ -11846,7 +11846,7 @@
                   <a:schemeClr val="accent6"/>
                 </a:solidFill>
               </a:rPr>
-              <a:t>2024-01-02 ~ 2026-09-14 · 종목당 약 2년 8개월</a:t>
+              <a:t>2024-01-02 ~ 2026-09-14, 종목당 약 2년 8개월</a:t>
             </a:r>
             <a:endParaRPr lang="en-US" sz="1100" dirty="0"/>
           </a:p>
@@ -12026,7 +12026,7 @@
                   <a:schemeClr val="accent1"/>
                 </a:solidFill>
               </a:rPr>
-              <a:t>빠진 구간만 이어 받는다</a:t>
+              <a:t>빠진 구간만 이어 받습니다</a:t>
             </a:r>
             <a:endParaRPr lang="en-US" sz="1300" dirty="0"/>
           </a:p>
@@ -12134,7 +12134,7 @@
                   <a:schemeClr val="tx1"/>
                 </a:solidFill>
               </a:rPr>
-              <a:t>게임 한 판 = 시나리오</a:t>
+              <a:t>게임 한 판은 시나리오 하나로 진행됩니다</a:t>
             </a:r>
             <a:endParaRPr lang="en-US" sz="3000" dirty="0"/>
           </a:p>
@@ -12172,7 +12172,7 @@
                   <a:schemeClr val="accent6"/>
                 </a:solidFill>
               </a:rPr>
-              <a:t>같은 시각의 캔들 241개를 종목별로 묶은 것. 운영자가 미리 골라 둡니다</a:t>
+              <a:t>같은 시각의 캔들 241개를 종목별로 묶고, 운영자가 미리 골라 둡니다</a:t>
             </a:r>
             <a:endParaRPr lang="en-US" sz="1400" dirty="0"/>
           </a:p>
@@ -12340,7 +12340,7 @@
                   <a:schemeClr val="bg1"/>
                 </a:solidFill>
               </a:rPr>
-              <a:t>240틱 — 1초에 1봉</a:t>
+              <a:t>240틱, 1초에 1봉</a:t>
             </a:r>
             <a:endParaRPr lang="en-US" sz="1100" dirty="0"/>
           </a:p>
@@ -12568,7 +12568,7 @@
                   <a:schemeClr val="accent6"/>
                 </a:solidFill>
               </a:rPr>
-              <a:t>시작가 1봉 + 240봉 = 241봉. 모든 종목의 i 번째 봉은 같은 시각</a:t>
+              <a:t>시작가 1봉과 240봉, 총 241봉. 모든 종목의 같은 순번 봉은 같은 시각</a:t>
             </a:r>
             <a:endParaRPr lang="en-US" sz="1200" dirty="0"/>
           </a:p>
@@ -12836,7 +12836,7 @@
                   <a:schemeClr val="tx1"/>
                 </a:solidFill>
               </a:rPr>
-              <a:t>종목 이름은 라벨로 가린다</a:t>
+              <a:t>종목 이름은 라벨로 가립니다</a:t>
             </a:r>
             <a:endParaRPr lang="en-US" sz="1400" dirty="0"/>
           </a:p>
@@ -12872,7 +12872,7 @@
                   <a:schemeClr val="accent6"/>
                 </a:solidFill>
               </a:rPr>
-              <a:t>A · B · C 는 등록할 때 무작위로 붙인다.</a:t>
+              <a:t>A, B, C는 등록 시 무작위 배정</a:t>
             </a:r>
             <a:endParaRPr lang="en-US" sz="1100" dirty="0"/>
           </a:p>
@@ -12886,7 +12886,7 @@
                   <a:schemeClr val="accent6"/>
                 </a:solidFill>
               </a:rPr>
-              <a:t>매번 A 가 같은 종목이면 가리는 의미가 없다</a:t>
+              <a:t>매번 A가 같은 종목이면 가리는 의미 없음</a:t>
             </a:r>
             <a:endParaRPr lang="en-US" sz="1100" dirty="0"/>
           </a:p>
@@ -12966,7 +12966,7 @@
                   <a:schemeClr val="tx1"/>
                 </a:solidFill>
               </a:rPr>
-              <a:t>날짜가 어긋나면 쓰지 않는다</a:t>
+              <a:t>날짜가 어긋나면 쓰지 않습니다</a:t>
             </a:r>
             <a:endParaRPr lang="en-US" sz="1400" dirty="0"/>
           </a:p>
@@ -13016,7 +13016,7 @@
                   <a:schemeClr val="accent6"/>
                 </a:solidFill>
               </a:rPr>
-              <a:t>틱마다 종목별 날짜가 달라진다</a:t>
+              <a:t>틱마다 종목별 날짜가 달라짐</a:t>
             </a:r>
             <a:endParaRPr lang="en-US" sz="1100" dirty="0"/>
           </a:p>
@@ -13096,7 +13096,7 @@
                   <a:schemeClr val="tx1"/>
                 </a:solidFill>
               </a:rPr>
-              <a:t>후보는 자동, 선택은 사람</a:t>
+              <a:t>후보는 자동, 선택은 사람이 합니다</a:t>
             </a:r>
             <a:endParaRPr lang="en-US" sz="1400" dirty="0"/>
           </a:p>
@@ -13132,7 +13132,7 @@
                   <a:schemeClr val="accent6"/>
                 </a:solidFill>
               </a:rPr>
-              <a:t>기준을 통과한 구간을 변동폭 순으로 추리고,</a:t>
+              <a:t>기준 통과 구간을 변동폭 순으로 추림</a:t>
             </a:r>
             <a:endParaRPr lang="en-US" sz="1100" dirty="0"/>
           </a:p>
@@ -13146,7 +13146,7 @@
                   <a:schemeClr val="accent6"/>
                 </a:solidFill>
               </a:rPr>
-              <a:t>어떤 판을 쓸지는 사람이 고른다</a:t>
+              <a:t>실제로 쓸 판은 사람이 선택</a:t>
             </a:r>
             <a:endParaRPr lang="en-US" sz="1100" dirty="0"/>
           </a:p>
@@ -13254,7 +13254,7 @@
                   <a:schemeClr val="tx1"/>
                 </a:solidFill>
               </a:rPr>
-              <a:t>분봉은 09:01 ~ 15:20 만 쓴다</a:t>
+              <a:t>분봉은 09:01 ~ 15:20 구간만 사용합니다</a:t>
             </a:r>
             <a:endParaRPr lang="en-US" sz="3000" dirty="0"/>
           </a:p>
@@ -13292,7 +13292,7 @@
                   <a:schemeClr val="accent6"/>
                 </a:solidFill>
               </a:rPr>
-              <a:t>API 분봉은 시간외까지 하루 720봉. 시간외와 경계 봉에는 「거래량 0」 봉이 몰려 있습니다</a:t>
+              <a:t>API 분봉은 시간외까지 하루 720봉입니다. 시간외와 경계 봉에 거래가 없는 봉이 몰려 있었습니다</a:t>
             </a:r>
             <a:endParaRPr lang="en-US" sz="1400" dirty="0"/>
           </a:p>
@@ -13864,7 +13864,7 @@
                   <a:schemeClr val="tx1"/>
                 </a:solidFill>
               </a:rPr>
-              <a:t>거래량 0 봉 15.3%</a:t>
+              <a:t>무거래 봉 15.3%</a:t>
             </a:r>
             <a:endParaRPr lang="en-US" sz="1200" dirty="0"/>
           </a:p>
@@ -13923,7 +13923,7 @@
                   <a:schemeClr val="tx1"/>
                 </a:solidFill>
               </a:rPr>
-              <a:t>09:00 봉 = 개장 전 1분 [08:59, 09:00)</a:t>
+              <a:t>09:00 봉 (개장 전 1분)</a:t>
             </a:r>
             <a:endParaRPr lang="en-US" sz="1200" dirty="0"/>
           </a:p>
@@ -13959,7 +13959,7 @@
                   <a:schemeClr val="accent2"/>
                 </a:solidFill>
               </a:rPr>
-              <a:t>14일 모두 거래량 0</a:t>
+              <a:t>14일 모두 무거래</a:t>
             </a:r>
             <a:endParaRPr lang="en-US" sz="1200" dirty="0"/>
           </a:p>
@@ -14018,7 +14018,7 @@
                   <a:schemeClr val="tx1"/>
                 </a:solidFill>
               </a:rPr>
-              <a:t>15:21 ~ 15:30 종가 단일가</a:t>
+              <a:t>15:21 ~ 15:30 (종가 단일가)</a:t>
             </a:r>
             <a:endParaRPr lang="en-US" sz="1200" dirty="0"/>
           </a:p>
@@ -14054,7 +14054,7 @@
                   <a:schemeClr val="accent2"/>
                 </a:solidFill>
               </a:rPr>
-              <a:t>14일 모두 거래량 0</a:t>
+              <a:t>14일 모두 무거래</a:t>
             </a:r>
             <a:endParaRPr lang="en-US" sz="1200" dirty="0"/>
           </a:p>
@@ -14244,7 +14244,7 @@
                   <a:schemeClr val="accent1"/>
                 </a:solidFill>
               </a:rPr>
-              <a:t>거래량 0 봉 0 ~ 1.7%</a:t>
+              <a:t>무거래 봉 0 ~ 1.7%</a:t>
             </a:r>
             <a:endParaRPr lang="en-US" sz="1200" dirty="0"/>
           </a:p>
@@ -14419,7 +14419,7 @@
                   <a:schemeClr val="accent6"/>
                 </a:solidFill>
               </a:rPr>
-              <a:t>거래량 0 봉 비율</a:t>
+              <a:t>무거래 봉 비율</a:t>
             </a:r>
             <a:endParaRPr lang="en-US" sz="1100" dirty="0"/>
           </a:p>
@@ -14513,7 +14513,7 @@
                   <a:schemeClr val="accent6"/>
                 </a:solidFill>
               </a:rPr>
-              <a:t>최대 연속 정지 (1틱 = 1초라 11초 정지)</a:t>
+              <a:t>최대 연속 정지 (1틱 = 1초, 11초 정지)</a:t>
             </a:r>
             <a:endParaRPr lang="en-US" sz="1100" dirty="0"/>
           </a:p>
@@ -14549,7 +14549,7 @@
                   <a:schemeClr val="tx1"/>
                 </a:solidFill>
               </a:rPr>
-              <a:t>하루 380봉 → 판 시작점 140개</a:t>
+              <a:t>하루 380봉, 판 시작점 140개</a:t>
             </a:r>
             <a:endParaRPr lang="en-US" sz="1100" dirty="0"/>
           </a:p>
@@ -14563,7 +14563,7 @@
                   <a:schemeClr val="tx1"/>
                 </a:solidFill>
               </a:rPr>
-              <a:t>날짜는 넘기지 않는다 (밤사이 갭)</a:t>
+              <a:t>날짜를 넘기지 않음 (밤사이 가격 공백)</a:t>
             </a:r>
             <a:endParaRPr lang="en-US" sz="1100" dirty="0"/>
           </a:p>
